--- a/ClassMaterials/MapsAndObjectIntro/Slides/Part4-Maps.pptx
+++ b/ClassMaterials/MapsAndObjectIntro/Slides/Part4-Maps.pptx
@@ -321,6 +321,22 @@
             <ac:spMk id="8" creationId="{00000000-0000-0000-0000-000000000000}"/>
           </ac:spMkLst>
         </pc:spChg>
+      </pc:sldChg>
+    </pc:docChg>
+  </pc:docChgLst>
+  <pc:docChgLst>
+    <pc:chgData name="Lewandowski, Alec" userId="S::lewandaj@rose-hulman.edu::7c69e43b-7396-47b2-a000-e4b1fd9aa6ef" providerId="AD" clId="Web-{4449F7AC-1410-4252-986F-7997E84350D8}"/>
+    <pc:docChg chg="addSld delSld">
+      <pc:chgData name="Lewandowski, Alec" userId="S::lewandaj@rose-hulman.edu::7c69e43b-7396-47b2-a000-e4b1fd9aa6ef" providerId="AD" clId="Web-{4449F7AC-1410-4252-986F-7997E84350D8}" dt="2022-09-08T14:56:06.982" v="1"/>
+      <pc:docMkLst>
+        <pc:docMk/>
+      </pc:docMkLst>
+      <pc:sldChg chg="add del">
+        <pc:chgData name="Lewandowski, Alec" userId="S::lewandaj@rose-hulman.edu::7c69e43b-7396-47b2-a000-e4b1fd9aa6ef" providerId="AD" clId="Web-{4449F7AC-1410-4252-986F-7997E84350D8}" dt="2022-09-08T14:56:06.982" v="1"/>
+        <pc:sldMkLst>
+          <pc:docMk/>
+          <pc:sldMk cId="3615992630" sldId="319"/>
+        </pc:sldMkLst>
       </pc:sldChg>
     </pc:docChg>
   </pc:docChgLst>
@@ -758,22 +774,6 @@
     </pc:docChg>
   </pc:docChgLst>
   <pc:docChgLst>
-    <pc:chgData name="Lewandowski, Alec" userId="S::lewandaj@rose-hulman.edu::7c69e43b-7396-47b2-a000-e4b1fd9aa6ef" providerId="AD" clId="Web-{4449F7AC-1410-4252-986F-7997E84350D8}"/>
-    <pc:docChg chg="addSld delSld">
-      <pc:chgData name="Lewandowski, Alec" userId="S::lewandaj@rose-hulman.edu::7c69e43b-7396-47b2-a000-e4b1fd9aa6ef" providerId="AD" clId="Web-{4449F7AC-1410-4252-986F-7997E84350D8}" dt="2022-09-08T14:56:06.982" v="1"/>
-      <pc:docMkLst>
-        <pc:docMk/>
-      </pc:docMkLst>
-      <pc:sldChg chg="add del">
-        <pc:chgData name="Lewandowski, Alec" userId="S::lewandaj@rose-hulman.edu::7c69e43b-7396-47b2-a000-e4b1fd9aa6ef" providerId="AD" clId="Web-{4449F7AC-1410-4252-986F-7997E84350D8}" dt="2022-09-08T14:56:06.982" v="1"/>
-        <pc:sldMkLst>
-          <pc:docMk/>
-          <pc:sldMk cId="3615992630" sldId="319"/>
-        </pc:sldMkLst>
-      </pc:sldChg>
-    </pc:docChg>
-  </pc:docChgLst>
-  <pc:docChgLst>
     <pc:chgData name="Hollingsworth, Joseph" userId="6338ef61-550f-4a52-a8a3-bd9025908f10" providerId="ADAL" clId="{82C04DF7-5114-CF43-A7F9-40D6478D9412}"/>
     <pc:docChg chg="modSld">
       <pc:chgData name="Hollingsworth, Joseph" userId="6338ef61-550f-4a52-a8a3-bd9025908f10" providerId="ADAL" clId="{82C04DF7-5114-CF43-A7F9-40D6478D9412}" dt="2022-03-10T02:02:35.406" v="16" actId="6549"/>
@@ -917,7 +917,7 @@
               <a:pPr>
                 <a:defRPr/>
               </a:pPr>
-              <a:t>3/14/2025</a:t>
+              <a:t>9/11/2026</a:t>
             </a:fld>
             <a:endParaRPr lang="en-US"/>
           </a:p>
@@ -1236,7 +1236,7 @@
               <a:pPr>
                 <a:defRPr/>
               </a:pPr>
-              <a:t>3/14/2025</a:t>
+              <a:t>9/11/2026</a:t>
             </a:fld>
             <a:endParaRPr lang="en-US"/>
           </a:p>
@@ -3104,7 +3104,7 @@
               <a:pPr>
                 <a:defRPr/>
               </a:pPr>
-              <a:t>Friday, March 14, 2025</a:t>
+              <a:t>Friday, September 11, 2026</a:t>
             </a:fld>
             <a:endParaRPr lang="en-US"/>
           </a:p>
@@ -3287,7 +3287,7 @@
               <a:pPr>
                 <a:defRPr/>
               </a:pPr>
-              <a:t>Friday, March 14, 2025</a:t>
+              <a:t>Friday, September 11, 2026</a:t>
             </a:fld>
             <a:endParaRPr lang="en-US"/>
           </a:p>
@@ -3480,7 +3480,7 @@
               <a:pPr>
                 <a:defRPr/>
               </a:pPr>
-              <a:t>Friday, March 14, 2025</a:t>
+              <a:t>Friday, September 11, 2026</a:t>
             </a:fld>
             <a:endParaRPr lang="en-US"/>
           </a:p>
@@ -3663,7 +3663,7 @@
               <a:pPr>
                 <a:defRPr/>
               </a:pPr>
-              <a:t>Friday, March 14, 2025</a:t>
+              <a:t>Friday, September 11, 2026</a:t>
             </a:fld>
             <a:endParaRPr lang="en-US"/>
           </a:p>
@@ -3923,7 +3923,7 @@
               <a:pPr>
                 <a:defRPr/>
               </a:pPr>
-              <a:t>Friday, March 14, 2025</a:t>
+              <a:t>Friday, September 11, 2026</a:t>
             </a:fld>
             <a:endParaRPr lang="en-US"/>
           </a:p>
@@ -4223,7 +4223,7 @@
               <a:pPr>
                 <a:defRPr/>
               </a:pPr>
-              <a:t>Friday, March 14, 2025</a:t>
+              <a:t>Friday, September 11, 2026</a:t>
             </a:fld>
             <a:endParaRPr lang="en-US"/>
           </a:p>
@@ -4657,7 +4657,7 @@
               <a:pPr>
                 <a:defRPr/>
               </a:pPr>
-              <a:t>Friday, March 14, 2025</a:t>
+              <a:t>Friday, September 11, 2026</a:t>
             </a:fld>
             <a:endParaRPr lang="en-US"/>
           </a:p>
@@ -4789,7 +4789,7 @@
               <a:pPr>
                 <a:defRPr/>
               </a:pPr>
-              <a:t>Friday, March 14, 2025</a:t>
+              <a:t>Friday, September 11, 2026</a:t>
             </a:fld>
             <a:endParaRPr lang="en-US"/>
           </a:p>
@@ -4899,7 +4899,7 @@
               <a:pPr>
                 <a:defRPr/>
               </a:pPr>
-              <a:t>Friday, March 14, 2025</a:t>
+              <a:t>Friday, September 11, 2026</a:t>
             </a:fld>
             <a:endParaRPr lang="en-US"/>
           </a:p>
@@ -5189,7 +5189,7 @@
               <a:pPr>
                 <a:defRPr/>
               </a:pPr>
-              <a:t>Friday, March 14, 2025</a:t>
+              <a:t>Friday, September 11, 2026</a:t>
             </a:fld>
             <a:endParaRPr lang="en-US"/>
           </a:p>
@@ -5456,7 +5456,7 @@
               <a:pPr>
                 <a:defRPr/>
               </a:pPr>
-              <a:t>Friday, March 14, 2025</a:t>
+              <a:t>Friday, September 11, 2026</a:t>
             </a:fld>
             <a:endParaRPr lang="en-US"/>
           </a:p>
@@ -5682,7 +5682,7 @@
               <a:pPr>
                 <a:defRPr/>
               </a:pPr>
-              <a:t>Friday, March 14, 2025</a:t>
+              <a:t>Friday, September 11, 2026</a:t>
             </a:fld>
             <a:endParaRPr lang="en-US"/>
           </a:p>
@@ -9420,7 +9420,7 @@
         </p:spPr>
         <p:txBody>
           <a:bodyPr>
-            <a:normAutofit fontScale="92500" lnSpcReduction="20000"/>
+            <a:normAutofit/>
           </a:bodyPr>
           <a:lstStyle/>
           <a:p>
@@ -9440,34 +9440,7 @@
             <a:endParaRPr lang="en-US" sz="2800" i="1" dirty="0"/>
           </a:p>
           <a:p>
-            <a:r>
-              <a:rPr lang="en-US" sz="2800" i="1" dirty="0" err="1"/>
-              <a:t>MapsAndObjectIntroQuiz</a:t>
-            </a:r>
             <a:endParaRPr lang="en-US" sz="2800" i="1" dirty="0"/>
-          </a:p>
-          <a:p>
-            <a:endParaRPr lang="en-US" sz="2800" dirty="0"/>
-          </a:p>
-          <a:p>
-            <a:r>
-              <a:rPr lang="en-US" sz="2800" dirty="0"/>
-              <a:t>Post ANY questions to Piazza </a:t>
-            </a:r>
-            <a:r>
-              <a:rPr lang="en-US" sz="2800" b="1" i="1" u="sng" dirty="0"/>
-              <a:t>even including code </a:t>
-            </a:r>
-            <a:r>
-              <a:rPr lang="en-US" sz="2800" dirty="0"/>
-              <a:t>since this is purely collaborative exercise and the solution code is available to you</a:t>
-            </a:r>
-          </a:p>
-          <a:p>
-            <a:r>
-              <a:rPr lang="en-US" sz="2800" dirty="0"/>
-              <a:t>Please help! Post answers to questions posted by other students</a:t>
-            </a:r>
           </a:p>
           <a:p>
             <a:endParaRPr lang="en-US" sz="2800" dirty="0"/>
@@ -13056,7 +13029,7 @@
         </p:spPr>
         <p:txBody>
           <a:bodyPr>
-            <a:normAutofit fontScale="92500" lnSpcReduction="10000"/>
+            <a:normAutofit/>
           </a:bodyPr>
           <a:lstStyle/>
           <a:p>
@@ -13087,26 +13060,6 @@
             <a:r>
               <a:rPr lang="en-US" dirty="0"/>
               <a:t>Then solve the map problems in today’s code</a:t>
-            </a:r>
-          </a:p>
-          <a:p>
-            <a:r>
-              <a:rPr lang="en-US" dirty="0"/>
-              <a:t>Post ANY questions to Piazza </a:t>
-            </a:r>
-            <a:r>
-              <a:rPr lang="en-US" b="1" i="1" u="sng" dirty="0"/>
-              <a:t>even including code </a:t>
-            </a:r>
-            <a:r>
-              <a:rPr lang="en-US" dirty="0"/>
-              <a:t>since this is purely collaborative exercise and the solution code is available to you</a:t>
-            </a:r>
-          </a:p>
-          <a:p>
-            <a:r>
-              <a:rPr lang="en-US" dirty="0"/>
-              <a:t>Please look to help answer questions other students post</a:t>
             </a:r>
           </a:p>
           <a:p>
@@ -13976,6 +13929,15 @@
 </file>
 
 <file path=customXml/item1.xml><?xml version="1.0" encoding="utf-8"?>
+<?mso-contentType ?>
+<FormTemplates xmlns="http://schemas.microsoft.com/sharepoint/v3/contenttype/forms">
+  <Display>DocumentLibraryForm</Display>
+  <Edit>DocumentLibraryForm</Edit>
+  <New>DocumentLibraryForm</New>
+</FormTemplates>
+</file>
+
+<file path=customXml/item2.xml><?xml version="1.0" encoding="utf-8"?>
 <ct:contentTypeSchema xmlns:ct="http://schemas.microsoft.com/office/2006/metadata/contentType" xmlns:ma="http://schemas.microsoft.com/office/2006/metadata/properties/metaAttributes" ct:_="" ma:_="" ma:contentTypeName="Document" ma:contentTypeID="0x0101004285D81DBE5F5A448E892B34D6B8CF20" ma:contentTypeVersion="8" ma:contentTypeDescription="Create a new document." ma:contentTypeScope="" ma:versionID="ecce54155d2ea7caa9aed06c8b6b9867">
   <xsd:schema xmlns:xsd="http://www.w3.org/2001/XMLSchema" xmlns:xs="http://www.w3.org/2001/XMLSchema" xmlns:p="http://schemas.microsoft.com/office/2006/metadata/properties" xmlns:ns2="08600313-7276-4ca7-b5d3-7d86193ee0ac" xmlns:ns3="820f9cb1-409d-4c4b-8197-1d4f7dd48124" targetNamespace="http://schemas.microsoft.com/office/2006/metadata/properties" ma:root="true" ma:fieldsID="bfd7385540b70b2fe84ac888cc214377" ns2:_="" ns3:_="">
     <xsd:import namespace="08600313-7276-4ca7-b5d3-7d86193ee0ac"/>
@@ -14152,15 +14114,6 @@
 </ct:contentTypeSchema>
 </file>
 
-<file path=customXml/item2.xml><?xml version="1.0" encoding="utf-8"?>
-<?mso-contentType ?>
-<FormTemplates xmlns="http://schemas.microsoft.com/sharepoint/v3/contenttype/forms">
-  <Display>DocumentLibraryForm</Display>
-  <Edit>DocumentLibraryForm</Edit>
-  <New>DocumentLibraryForm</New>
-</FormTemplates>
-</file>
-
 <file path=customXml/item3.xml><?xml version="1.0" encoding="utf-8"?>
 <p:properties xmlns:p="http://schemas.microsoft.com/office/2006/metadata/properties" xmlns:xsi="http://www.w3.org/2001/XMLSchema-instance" xmlns:pc="http://schemas.microsoft.com/office/infopath/2007/PartnerControls">
   <documentManagement>
@@ -14173,6 +14126,14 @@
 </file>
 
 <file path=customXml/itemProps1.xml><?xml version="1.0" encoding="utf-8"?>
+<ds:datastoreItem xmlns:ds="http://schemas.openxmlformats.org/officeDocument/2006/customXml" ds:itemID="{29A08FB1-921F-4826-8B4B-8F80D137C2A8}">
+  <ds:schemaRefs>
+    <ds:schemaRef ds:uri="http://schemas.microsoft.com/sharepoint/v3/contenttype/forms"/>
+  </ds:schemaRefs>
+</ds:datastoreItem>
+</file>
+
+<file path=customXml/itemProps2.xml><?xml version="1.0" encoding="utf-8"?>
 <ds:datastoreItem xmlns:ds="http://schemas.openxmlformats.org/officeDocument/2006/customXml" ds:itemID="{506930A9-2269-4C50-A3CA-3568D9D5863C}">
   <ds:schemaRefs>
     <ds:schemaRef ds:uri="http://schemas.microsoft.com/office/2006/metadata/contentType"/>
@@ -14187,14 +14148,6 @@
     <ds:schemaRef ds:uri="http://purl.org/dc/elements/1.1/"/>
     <ds:schemaRef ds:uri="http://purl.org/dc/terms/"/>
     <ds:schemaRef ds:uri="http://schemas.microsoft.com/internal/obd"/>
-  </ds:schemaRefs>
-</ds:datastoreItem>
-</file>
-
-<file path=customXml/itemProps2.xml><?xml version="1.0" encoding="utf-8"?>
-<ds:datastoreItem xmlns:ds="http://schemas.openxmlformats.org/officeDocument/2006/customXml" ds:itemID="{29A08FB1-921F-4826-8B4B-8F80D137C2A8}">
-  <ds:schemaRefs>
-    <ds:schemaRef ds:uri="http://schemas.microsoft.com/sharepoint/v3/contenttype/forms"/>
   </ds:schemaRefs>
 </ds:datastoreItem>
 </file>
